--- a/curso/pptx/S63.pptx
+++ b/curso/pptx/S63.pptx
@@ -473,426 +473,6 @@
     </a:lvl9pPr>
   </p:notesStyle>
 </p:notesMaster>
-</file>
-
-<file path=ppt/notesSlides/notesSlide1.xml><?xml version="1.0" encoding="utf-8"?>
-<p:notes xmlns:a="http://schemas.openxmlformats.org/drawingml/2006/main" xmlns:p="http://schemas.openxmlformats.org/presentationml/2006/main" xmlns:r="http://schemas.openxmlformats.org/officeDocument/2006/relationships">
-  <p:cSld>
-    <p:spTree>
-      <p:nvGrpSpPr>
-        <p:cNvPr id="1" name=""/>
-        <p:cNvGrpSpPr/>
-        <p:nvPr/>
-      </p:nvGrpSpPr>
-      <p:grpSpPr>
-        <a:xfrm>
-          <a:off x="0" y="0"/>
-          <a:ext cx="0" cy="0"/>
-          <a:chOff x="0" y="0"/>
-          <a:chExt cx="0" cy="0"/>
-        </a:xfrm>
-      </p:grpSpPr>
-      <p:sp>
-        <p:nvSpPr>
-          <p:cNvPr id="2" name="Slide Image Placeholder 1"/>
-          <p:cNvSpPr>
-            <a:spLocks noGrp="1"/>
-          </p:cNvSpPr>
-          <p:nvPr>
-            <p:ph type="sldImg" idx="2"/>
-          </p:nvPr>
-        </p:nvSpPr>
-        <p:spPr/>
-      </p:sp>
-      <p:sp>
-        <p:nvSpPr>
-          <p:cNvPr id="3" name="Notes Placeholder 2"/>
-          <p:cNvSpPr>
-            <a:spLocks noGrp="1"/>
-          </p:cNvSpPr>
-          <p:nvPr>
-            <p:ph type="body" idx="3" sz="quarter"/>
-          </p:nvPr>
-        </p:nvSpPr>
-        <p:spPr/>
-        <p:txBody>
-          <a:bodyPr/>
-          <a:lstStyle/>
-          <a:p>
-            <a:r>
-              <a:t>3 minutos. Sin apuntes. Es para recordar, no cuenta para nota.</a:t>
-            </a:r>
-          </a:p>
-        </p:txBody>
-      </p:sp>
-      <p:sp>
-        <p:nvSpPr>
-          <p:cNvPr id="4" name="Slide Number Placeholder 3"/>
-          <p:cNvSpPr>
-            <a:spLocks noGrp="1"/>
-          </p:cNvSpPr>
-          <p:nvPr>
-            <p:ph type="sldNum" idx="5" sz="quarter"/>
-          </p:nvPr>
-        </p:nvSpPr>
-        <p:spPr/>
-      </p:sp>
-    </p:spTree>
-  </p:cSld>
-  <p:clrMapOvr>
-    <a:masterClrMapping/>
-  </p:clrMapOvr>
-</p:notes>
-</file>
-
-<file path=ppt/notesSlides/notesSlide2.xml><?xml version="1.0" encoding="utf-8"?>
-<p:notes xmlns:a="http://schemas.openxmlformats.org/drawingml/2006/main" xmlns:p="http://schemas.openxmlformats.org/presentationml/2006/main" xmlns:r="http://schemas.openxmlformats.org/officeDocument/2006/relationships">
-  <p:cSld>
-    <p:spTree>
-      <p:nvGrpSpPr>
-        <p:cNvPr id="1" name=""/>
-        <p:cNvGrpSpPr/>
-        <p:nvPr/>
-      </p:nvGrpSpPr>
-      <p:grpSpPr>
-        <a:xfrm>
-          <a:off x="0" y="0"/>
-          <a:ext cx="0" cy="0"/>
-          <a:chOff x="0" y="0"/>
-          <a:chExt cx="0" cy="0"/>
-        </a:xfrm>
-      </p:grpSpPr>
-      <p:sp>
-        <p:nvSpPr>
-          <p:cNvPr id="2" name="Slide Image Placeholder 1"/>
-          <p:cNvSpPr>
-            <a:spLocks noGrp="1"/>
-          </p:cNvSpPr>
-          <p:nvPr>
-            <p:ph type="sldImg" idx="2"/>
-          </p:nvPr>
-        </p:nvSpPr>
-        <p:spPr/>
-      </p:sp>
-      <p:sp>
-        <p:nvSpPr>
-          <p:cNvPr id="3" name="Notes Placeholder 2"/>
-          <p:cNvSpPr>
-            <a:spLocks noGrp="1"/>
-          </p:cNvSpPr>
-          <p:nvPr>
-            <p:ph type="body" idx="3" sz="quarter"/>
-          </p:nvPr>
-        </p:nvSpPr>
-        <p:spPr/>
-        <p:txBody>
-          <a:bodyPr/>
-          <a:lstStyle/>
-          <a:p>
-            <a:r>
-              <a:t>3 minutos. Sin apuntes. Es para recordar, no cuenta para nota.</a:t>
-            </a:r>
-          </a:p>
-        </p:txBody>
-      </p:sp>
-      <p:sp>
-        <p:nvSpPr>
-          <p:cNvPr id="4" name="Slide Number Placeholder 3"/>
-          <p:cNvSpPr>
-            <a:spLocks noGrp="1"/>
-          </p:cNvSpPr>
-          <p:nvPr>
-            <p:ph type="sldNum" idx="5" sz="quarter"/>
-          </p:nvPr>
-        </p:nvSpPr>
-        <p:spPr/>
-      </p:sp>
-    </p:spTree>
-  </p:cSld>
-  <p:clrMapOvr>
-    <a:masterClrMapping/>
-  </p:clrMapOvr>
-</p:notes>
-</file>
-
-<file path=ppt/notesSlides/notesSlide3.xml><?xml version="1.0" encoding="utf-8"?>
-<p:notes xmlns:a="http://schemas.openxmlformats.org/drawingml/2006/main" xmlns:p="http://schemas.openxmlformats.org/presentationml/2006/main" xmlns:r="http://schemas.openxmlformats.org/officeDocument/2006/relationships">
-  <p:cSld>
-    <p:spTree>
-      <p:nvGrpSpPr>
-        <p:cNvPr id="1" name=""/>
-        <p:cNvGrpSpPr/>
-        <p:nvPr/>
-      </p:nvGrpSpPr>
-      <p:grpSpPr>
-        <a:xfrm>
-          <a:off x="0" y="0"/>
-          <a:ext cx="0" cy="0"/>
-          <a:chOff x="0" y="0"/>
-          <a:chExt cx="0" cy="0"/>
-        </a:xfrm>
-      </p:grpSpPr>
-      <p:sp>
-        <p:nvSpPr>
-          <p:cNvPr id="2" name="Slide Image Placeholder 1"/>
-          <p:cNvSpPr>
-            <a:spLocks noGrp="1"/>
-          </p:cNvSpPr>
-          <p:nvPr>
-            <p:ph type="sldImg" idx="2"/>
-          </p:nvPr>
-        </p:nvSpPr>
-        <p:spPr/>
-      </p:sp>
-      <p:sp>
-        <p:nvSpPr>
-          <p:cNvPr id="3" name="Notes Placeholder 2"/>
-          <p:cNvSpPr>
-            <a:spLocks noGrp="1"/>
-          </p:cNvSpPr>
-          <p:nvPr>
-            <p:ph type="body" idx="3" sz="quarter"/>
-          </p:nvPr>
-        </p:nvSpPr>
-        <p:spPr/>
-        <p:txBody>
-          <a:bodyPr/>
-          <a:lstStyle/>
-          <a:p>
-            <a:r>
-              <a:t>Nadie tiene que contestar: solo pensarlo.</a:t>
-            </a:r>
-          </a:p>
-        </p:txBody>
-      </p:sp>
-      <p:sp>
-        <p:nvSpPr>
-          <p:cNvPr id="4" name="Slide Number Placeholder 3"/>
-          <p:cNvSpPr>
-            <a:spLocks noGrp="1"/>
-          </p:cNvSpPr>
-          <p:nvPr>
-            <p:ph type="sldNum" idx="5" sz="quarter"/>
-          </p:nvPr>
-        </p:nvSpPr>
-        <p:spPr/>
-      </p:sp>
-    </p:spTree>
-  </p:cSld>
-  <p:clrMapOvr>
-    <a:masterClrMapping/>
-  </p:clrMapOvr>
-</p:notes>
-</file>
-
-<file path=ppt/notesSlides/notesSlide4.xml><?xml version="1.0" encoding="utf-8"?>
-<p:notes xmlns:a="http://schemas.openxmlformats.org/drawingml/2006/main" xmlns:p="http://schemas.openxmlformats.org/presentationml/2006/main" xmlns:r="http://schemas.openxmlformats.org/officeDocument/2006/relationships">
-  <p:cSld>
-    <p:spTree>
-      <p:nvGrpSpPr>
-        <p:cNvPr id="1" name=""/>
-        <p:cNvGrpSpPr/>
-        <p:nvPr/>
-      </p:nvGrpSpPr>
-      <p:grpSpPr>
-        <a:xfrm>
-          <a:off x="0" y="0"/>
-          <a:ext cx="0" cy="0"/>
-          <a:chOff x="0" y="0"/>
-          <a:chExt cx="0" cy="0"/>
-        </a:xfrm>
-      </p:grpSpPr>
-      <p:sp>
-        <p:nvSpPr>
-          <p:cNvPr id="2" name="Slide Image Placeholder 1"/>
-          <p:cNvSpPr>
-            <a:spLocks noGrp="1"/>
-          </p:cNvSpPr>
-          <p:nvPr>
-            <p:ph type="sldImg" idx="2"/>
-          </p:nvPr>
-        </p:nvSpPr>
-        <p:spPr/>
-      </p:sp>
-      <p:sp>
-        <p:nvSpPr>
-          <p:cNvPr id="3" name="Notes Placeholder 2"/>
-          <p:cNvSpPr>
-            <a:spLocks noGrp="1"/>
-          </p:cNvSpPr>
-          <p:nvPr>
-            <p:ph type="body" idx="3" sz="quarter"/>
-          </p:nvPr>
-        </p:nvSpPr>
-        <p:spPr/>
-        <p:txBody>
-          <a:bodyPr/>
-          <a:lstStyle/>
-          <a:p>
-            <a:r>
-              <a:t>Dejar unos segundos para que piensen la respuesta fácil antes de enseñar los pasos.</a:t>
-            </a:r>
-          </a:p>
-        </p:txBody>
-      </p:sp>
-      <p:sp>
-        <p:nvSpPr>
-          <p:cNvPr id="4" name="Slide Number Placeholder 3"/>
-          <p:cNvSpPr>
-            <a:spLocks noGrp="1"/>
-          </p:cNvSpPr>
-          <p:nvPr>
-            <p:ph type="sldNum" idx="5" sz="quarter"/>
-          </p:nvPr>
-        </p:nvSpPr>
-        <p:spPr/>
-      </p:sp>
-    </p:spTree>
-  </p:cSld>
-  <p:clrMapOvr>
-    <a:masterClrMapping/>
-  </p:clrMapOvr>
-</p:notes>
-</file>
-
-<file path=ppt/notesSlides/notesSlide5.xml><?xml version="1.0" encoding="utf-8"?>
-<p:notes xmlns:a="http://schemas.openxmlformats.org/drawingml/2006/main" xmlns:p="http://schemas.openxmlformats.org/presentationml/2006/main" xmlns:r="http://schemas.openxmlformats.org/officeDocument/2006/relationships">
-  <p:cSld>
-    <p:spTree>
-      <p:nvGrpSpPr>
-        <p:cNvPr id="1" name=""/>
-        <p:cNvGrpSpPr/>
-        <p:nvPr/>
-      </p:nvGrpSpPr>
-      <p:grpSpPr>
-        <a:xfrm>
-          <a:off x="0" y="0"/>
-          <a:ext cx="0" cy="0"/>
-          <a:chOff x="0" y="0"/>
-          <a:chExt cx="0" cy="0"/>
-        </a:xfrm>
-      </p:grpSpPr>
-      <p:sp>
-        <p:nvSpPr>
-          <p:cNvPr id="2" name="Slide Image Placeholder 1"/>
-          <p:cNvSpPr>
-            <a:spLocks noGrp="1"/>
-          </p:cNvSpPr>
-          <p:nvPr>
-            <p:ph type="sldImg" idx="2"/>
-          </p:nvPr>
-        </p:nvSpPr>
-        <p:spPr/>
-      </p:sp>
-      <p:sp>
-        <p:nvSpPr>
-          <p:cNvPr id="3" name="Notes Placeholder 2"/>
-          <p:cNvSpPr>
-            <a:spLocks noGrp="1"/>
-          </p:cNvSpPr>
-          <p:nvPr>
-            <p:ph type="body" idx="3" sz="quarter"/>
-          </p:nvPr>
-        </p:nvSpPr>
-        <p:spPr/>
-        <p:txBody>
-          <a:bodyPr/>
-          <a:lstStyle/>
-          <a:p>
-            <a:r>
-              <a:t>Dejar 2 minutos para que lo escriban. La diapositiva siguiente muestra el resumen.</a:t>
-            </a:r>
-          </a:p>
-        </p:txBody>
-      </p:sp>
-      <p:sp>
-        <p:nvSpPr>
-          <p:cNvPr id="4" name="Slide Number Placeholder 3"/>
-          <p:cNvSpPr>
-            <a:spLocks noGrp="1"/>
-          </p:cNvSpPr>
-          <p:nvPr>
-            <p:ph type="sldNum" idx="5" sz="quarter"/>
-          </p:nvPr>
-        </p:nvSpPr>
-        <p:spPr/>
-      </p:sp>
-    </p:spTree>
-  </p:cSld>
-  <p:clrMapOvr>
-    <a:masterClrMapping/>
-  </p:clrMapOvr>
-</p:notes>
-</file>
-
-<file path=ppt/notesSlides/notesSlide6.xml><?xml version="1.0" encoding="utf-8"?>
-<p:notes xmlns:a="http://schemas.openxmlformats.org/drawingml/2006/main" xmlns:p="http://schemas.openxmlformats.org/presentationml/2006/main" xmlns:r="http://schemas.openxmlformats.org/officeDocument/2006/relationships">
-  <p:cSld>
-    <p:spTree>
-      <p:nvGrpSpPr>
-        <p:cNvPr id="1" name=""/>
-        <p:cNvGrpSpPr/>
-        <p:nvPr/>
-      </p:nvGrpSpPr>
-      <p:grpSpPr>
-        <a:xfrm>
-          <a:off x="0" y="0"/>
-          <a:ext cx="0" cy="0"/>
-          <a:chOff x="0" y="0"/>
-          <a:chExt cx="0" cy="0"/>
-        </a:xfrm>
-      </p:grpSpPr>
-      <p:sp>
-        <p:nvSpPr>
-          <p:cNvPr id="2" name="Slide Image Placeholder 1"/>
-          <p:cNvSpPr>
-            <a:spLocks noGrp="1"/>
-          </p:cNvSpPr>
-          <p:nvPr>
-            <p:ph type="sldImg" idx="2"/>
-          </p:nvPr>
-        </p:nvSpPr>
-        <p:spPr/>
-      </p:sp>
-      <p:sp>
-        <p:nvSpPr>
-          <p:cNvPr id="3" name="Notes Placeholder 2"/>
-          <p:cNvSpPr>
-            <a:spLocks noGrp="1"/>
-          </p:cNvSpPr>
-          <p:nvPr>
-            <p:ph type="body" idx="3" sz="quarter"/>
-          </p:nvPr>
-        </p:nvSpPr>
-        <p:spPr/>
-        <p:txBody>
-          <a:bodyPr/>
-          <a:lstStyle/>
-          <a:p>
-            <a:r>
-              <a:t>Buscar: «comunicación asertiva adolescentes» · «cómo discutir sin pelear»</a:t>
-            </a:r>
-          </a:p>
-        </p:txBody>
-      </p:sp>
-      <p:sp>
-        <p:nvSpPr>
-          <p:cNvPr id="4" name="Slide Number Placeholder 3"/>
-          <p:cNvSpPr>
-            <a:spLocks noGrp="1"/>
-          </p:cNvSpPr>
-          <p:nvPr>
-            <p:ph type="sldNum" idx="5" sz="quarter"/>
-          </p:nvPr>
-        </p:nvSpPr>
-        <p:spPr/>
-      </p:sp>
-    </p:spTree>
-  </p:cSld>
-  <p:clrMapOvr>
-    <a:masterClrMapping/>
-  </p:clrMapOvr>
-</p:notes>
 </file>
 
 <file path=ppt/slideLayouts/slideLayout1.xml><?xml version="1.0" encoding="utf-8"?>

--- a/curso/pptx/S63.pptx
+++ b/curso/pptx/S63.pptx
@@ -3801,7 +3801,7 @@
                 </a:solidFill>
                 <a:latin typeface="Nunito Sans"/>
               </a:rPr>
-              <a:t>Kevin: «Los videojuegos deberían tener un límite de horas». Aitor: «Lo dices porque eres malísimo jugando».</a:t>
+              <a:t>Una chica: «Los videojuegos deberían tener un límite de horas». Un chico: «Lo dices porque eres malísima jugando».</a:t>
             </a:r>
           </a:p>
         </p:txBody>
@@ -3849,7 +3849,7 @@
                 </a:solidFill>
                 <a:latin typeface="Nunito Sans"/>
               </a:rPr>
-              <a:t>Aitor ataca a Kevin, no a su idea: es un ataque a la persona (sesión 14).</a:t>
+              <a:t>El chico ataca a la chica, no a su idea: es un ataque a la persona (sesión 14).</a:t>
             </a:r>
           </a:p>
           <a:p>
@@ -3874,7 +3874,7 @@
                 </a:solidFill>
                 <a:latin typeface="Nunito Sans"/>
               </a:rPr>
-              <a:t>Sin ataque, Aitor podría decir: «No lo veo así: prefiero que cada familia decida su límite».</a:t>
+              <a:t>Sin ataque, el chico podría decir: «No lo veo así: prefiero que cada familia decida su límite».</a:t>
             </a:r>
           </a:p>
           <a:p>
@@ -3899,7 +3899,7 @@
                 </a:solidFill>
                 <a:latin typeface="Nunito Sans"/>
               </a:rPr>
-              <a:t>Ahora hay una razón que Kevin puede pensar y contestar.</a:t>
+              <a:t>Ahora hay una razón que la chica puede pensar y contestar.</a:t>
             </a:r>
           </a:p>
           <a:p>
@@ -4110,7 +4110,7 @@
                 </a:solidFill>
                 <a:latin typeface="Nunito Sans"/>
               </a:rPr>
-              <a:t>Iker: «El sábado vamos a ver la peli nueva». Naiara: «Mira, no la estrenan hasta el viernes que viene». Iker lo comprueba: «Tienes razón. ¿Bolera, entonces?».</a:t>
+              <a:t>Un chico: «El sábado vamos a ver la peli nueva». Una chica: «Mira, no la estrenan hasta el viernes que viene». El chico lo comprueba: «Tienes razón. ¿Bolera, entonces?».</a:t>
             </a:r>
           </a:p>
         </p:txBody>
@@ -4158,7 +4158,7 @@
                 </a:solidFill>
                 <a:latin typeface="Nunito Sans"/>
               </a:rPr>
-              <a:t>Naiara no ataca: corrige un dato y da una razón que se puede comprobar.</a:t>
+              <a:t>La chica no ataca: corrige un dato y da una razón que se puede comprobar.</a:t>
             </a:r>
           </a:p>
           <a:p>
@@ -4183,7 +4183,7 @@
                 </a:solidFill>
                 <a:latin typeface="Nunito Sans"/>
               </a:rPr>
-              <a:t>Iker lo comprueba y cambia de idea.</a:t>
+              <a:t>El chico lo comprueba y cambia de idea.</a:t>
             </a:r>
           </a:p>
           <a:p>
@@ -4208,7 +4208,7 @@
                 </a:solidFill>
                 <a:latin typeface="Nunito Sans"/>
               </a:rPr>
-              <a:t>¿Ha perdido Iker? No: ahora sabe algo que no sabía.</a:t>
+              <a:t>¿Ha perdido el chico? No: ahora sabe algo que no sabía.</a:t>
             </a:r>
           </a:p>
           <a:p>
@@ -4419,7 +4419,7 @@
                 </a:solidFill>
                 <a:latin typeface="Nunito Sans"/>
               </a:rPr>
-              <a:t>Chen propone ir en bici a la playa. Maialen: «No me convence: se tarda más de una hora y hemos quedado en media». Chen: «¡Siempre me atacas!».</a:t>
+              <a:t>Un chico propone ir en bici a la playa. Una chica: «No me convence: se tarda más de una hora y hemos quedado en media». El chico: «¡Siempre me atacas!».</a:t>
             </a:r>
           </a:p>
         </p:txBody>
@@ -4467,7 +4467,7 @@
                 </a:solidFill>
                 <a:latin typeface="Nunito Sans"/>
               </a:rPr>
-              <a:t>Chen se siente atacado. ¿Le ha atacado Maialen?</a:t>
+              <a:t>Ese chico se siente atacado. ¿Le ha atacado la chica?</a:t>
             </a:r>
           </a:p>
           <a:p>
@@ -4492,7 +4492,7 @@
                 </a:solidFill>
                 <a:latin typeface="Nunito Sans"/>
               </a:rPr>
-              <a:t>Parece que sí: Maialen dice que el plan de Chen no le convence.</a:t>
+              <a:t>Parece que sí: la chica dice que el plan del chico no le convence.</a:t>
             </a:r>
           </a:p>
           <a:p>
@@ -4517,7 +4517,7 @@
                 </a:solidFill>
                 <a:latin typeface="Nunito Sans"/>
               </a:rPr>
-              <a:t>Pero ¿de qué habla? Del plan y del tiempo, no de cómo es Chen.</a:t>
+              <a:t>Pero ¿de qué habla? Del plan y del tiempo, no de cómo es el chico.</a:t>
             </a:r>
           </a:p>
           <a:p>
@@ -6868,7 +6868,7 @@
                 </a:solidFill>
                 <a:latin typeface="Nunito Sans"/>
               </a:rPr>
-              <a:t>En una cena familiar, tu tío y tu prima hablan de fútbol. Él levanta la voz. Ella se ríe de él. Al final nadie recuerda de qué hablaban.</a:t>
+              <a:t>En una cena familiar, el tío y la prima de un chico hablan de fútbol. Él levanta la voz. Ella se ríe de él. Al final nadie recuerda de qué hablaban.</a:t>
             </a:r>
           </a:p>
         </p:txBody>

--- a/curso/pptx/S63.pptx
+++ b/curso/pptx/S63.pptx
@@ -3849,7 +3849,7 @@
                 </a:solidFill>
                 <a:latin typeface="Nunito Sans"/>
               </a:rPr>
-              <a:t>El chico ataca a la chica, no a su idea: es un ataque a la persona (sesión 14).</a:t>
+              <a:t>El chico ataca a la chica, no a su idea: es un ataque a la persona (sesión 20).</a:t>
             </a:r>
           </a:p>
           <a:p>
@@ -7274,7 +7274,7 @@
                 </a:solidFill>
                 <a:latin typeface="Nunito Sans"/>
               </a:rPr>
-              <a:t> (sesión 14).</a:t>
+              <a:t> (sesión 20).</a:t>
             </a:r>
           </a:p>
           <a:p>
